--- a/system-design-101/vi/lessons/sd-13-023/slides/sd-13-023.pptx
+++ b/system-design-101/vi/lessons/sd-13-023/slides/sd-13-023.pptx
@@ -1621,17 +1621,17 @@
           <a:ln/>
         </p:spPr>
         <p:txBody>
-          <a:bodyPr wrap="square" lIns="0" tIns="59436" rIns="0" bIns="-59436" rtlCol="0" anchor="t"/>
+          <a:bodyPr wrap="square" lIns="0" tIns="66866" rIns="0" bIns="-66866" rtlCol="0" anchor="t"/>
           <a:lstStyle/>
           <a:p>
             <a:pPr algn="l" indent="0" marL="0">
               <a:lnSpc>
-                <a:spcPts val="7632"/>
+                <a:spcPts val="8586"/>
               </a:lnSpc>
               <a:buNone/>
             </a:pPr>
             <a:r>
-              <a:rPr lang="en-US" sz="7200" dirty="0" spc="-1" kern="0">
+              <a:rPr lang="en-US" sz="8100" dirty="0" spc="4" kern="0">
                 <a:solidFill>
                   <a:srgbClr val="F3EEE3"/>
                 </a:solidFill>
@@ -1642,7 +1642,7 @@
               <a:t>NoOps</a:t>
             </a:r>
             <a:r>
-              <a:rPr lang="en-US" sz="7200" dirty="0" spc="-77" kern="0">
+              <a:rPr lang="en-US" sz="8100" dirty="0" spc="-87" kern="0">
                 <a:solidFill>
                   <a:srgbClr val="F3EEE3"/>
                 </a:solidFill>
@@ -1653,7 +1653,7 @@
               <a:t> và</a:t>
             </a:r>
             <a:r>
-              <a:rPr lang="en-US" sz="7200" dirty="0" spc="-27" kern="0">
+              <a:rPr lang="en-US" sz="8100" dirty="0" spc="-28" kern="0">
                 <a:solidFill>
                   <a:srgbClr val="F3EEE3"/>
                 </a:solidFill>
@@ -1664,7 +1664,7 @@
               <a:t> DevOps:</a:t>
             </a:r>
             <a:r>
-              <a:rPr lang="en-US" sz="7200" dirty="0" spc="0" kern="0">
+              <a:rPr lang="en-US" sz="8100" dirty="0" spc="1" kern="0">
                 <a:solidFill>
                   <a:srgbClr val="F3EEE3"/>
                 </a:solidFill>
@@ -1675,7 +1675,7 @@
               <a:t> mô</a:t>
             </a:r>
             <a:r>
-              <a:rPr lang="en-US" sz="7200" dirty="0" spc="-18" kern="0">
+              <a:rPr lang="en-US" sz="8100" dirty="0" spc="-17" kern="0">
                 <a:solidFill>
                   <a:srgbClr val="F3EEE3"/>
                 </a:solidFill>
@@ -1686,7 +1686,7 @@
               <a:t> hình</a:t>
             </a:r>
             <a:r>
-              <a:rPr lang="en-US" sz="7200" dirty="0" spc="-2" kern="0">
+              <a:rPr lang="en-US" sz="8100" dirty="0" spc="0" kern="0">
                 <a:solidFill>
                   <a:srgbClr val="F3EEE3"/>
                 </a:solidFill>
@@ -1694,10 +1694,10 @@
                 <a:ea typeface="Bricolage Grotesque ExtraBold" pitchFamily="34" charset="-122"/>
                 <a:cs typeface="Bricolage Grotesque ExtraBold" pitchFamily="34" charset="-120"/>
               </a:rPr>
-              <a:t> hosting</a:t>
-            </a:r>
-            <a:r>
-              <a:rPr lang="en-US" sz="7200" dirty="0" spc="0" kern="0">
+              <a:t> hosting khác</a:t>
+            </a:r>
+            <a:r>
+              <a:rPr lang="en-US" sz="8100" dirty="0" spc="2" kern="0">
                 <a:solidFill>
                   <a:srgbClr val="F3EEE3"/>
                 </a:solidFill>
@@ -1705,10 +1705,10 @@
                 <a:ea typeface="Bricolage Grotesque ExtraBold" pitchFamily="34" charset="-122"/>
                 <a:cs typeface="Bricolage Grotesque ExtraBold" pitchFamily="34" charset="-120"/>
               </a:rPr>
-              <a:t> khác</a:t>
-            </a:r>
-            <a:r>
-              <a:rPr lang="en-US" sz="7200" dirty="0" spc="2" kern="0">
+              <a:t> cách</a:t>
+            </a:r>
+            <a:r>
+              <a:rPr lang="en-US" sz="8100" dirty="0" spc="-41" kern="0">
                 <a:solidFill>
                   <a:srgbClr val="F3EEE3"/>
                 </a:solidFill>
@@ -1716,10 +1716,10 @@
                 <a:ea typeface="Bricolage Grotesque ExtraBold" pitchFamily="34" charset="-122"/>
                 <a:cs typeface="Bricolage Grotesque ExtraBold" pitchFamily="34" charset="-120"/>
               </a:rPr>
-              <a:t> cách</a:t>
-            </a:r>
-            <a:r>
-              <a:rPr lang="en-US" sz="7200" dirty="0" spc="-40" kern="0">
+              <a:t> tổ</a:t>
+            </a:r>
+            <a:r>
+              <a:rPr lang="en-US" sz="8100" dirty="0" spc="-64" kern="0">
                 <a:solidFill>
                   <a:srgbClr val="F3EEE3"/>
                 </a:solidFill>
@@ -1727,10 +1727,10 @@
                 <a:ea typeface="Bricolage Grotesque ExtraBold" pitchFamily="34" charset="-122"/>
                 <a:cs typeface="Bricolage Grotesque ExtraBold" pitchFamily="34" charset="-120"/>
               </a:rPr>
-              <a:t> tổ</a:t>
-            </a:r>
-            <a:r>
-              <a:rPr lang="en-US" sz="7200" dirty="0" spc="-56" kern="0">
+              <a:t> chức</a:t>
+            </a:r>
+            <a:r>
+              <a:rPr lang="en-US" sz="8100" dirty="0" spc="1" kern="0">
                 <a:solidFill>
                   <a:srgbClr val="F3EEE3"/>
                 </a:solidFill>
@@ -1738,20 +1738,9 @@
                 <a:ea typeface="Bricolage Grotesque ExtraBold" pitchFamily="34" charset="-122"/>
                 <a:cs typeface="Bricolage Grotesque ExtraBold" pitchFamily="34" charset="-120"/>
               </a:rPr>
-              <a:t> chức</a:t>
-            </a:r>
-            <a:r>
-              <a:rPr lang="en-US" sz="7200" dirty="0" spc="-1" kern="0">
-                <a:solidFill>
-                  <a:srgbClr val="F3EEE3"/>
-                </a:solidFill>
-                <a:latin typeface="Bricolage Grotesque ExtraBold" pitchFamily="34" charset="0"/>
-                <a:ea typeface="Bricolage Grotesque ExtraBold" pitchFamily="34" charset="-122"/>
-                <a:cs typeface="Bricolage Grotesque ExtraBold" pitchFamily="34" charset="-120"/>
-              </a:rPr>
               <a:t> nhóm</a:t>
             </a:r>
-            <a:endParaRPr lang="en-US" sz="7200" dirty="0"/>
+            <a:endParaRPr lang="en-US" sz="8100" dirty="0"/>
           </a:p>
         </p:txBody>
       </p:sp>
@@ -2277,7 +2266,7 @@
               <a:t> nhóm</a:t>
             </a:r>
             <a:r>
-              <a:rPr lang="en-US" sz="1650" dirty="0" spc="-3" kern="0">
+              <a:rPr lang="en-US" sz="1650" dirty="0" spc="-4" kern="0">
                 <a:solidFill>
                   <a:srgbClr val="9AA0B5"/>
                 </a:solidFill>
@@ -2285,10 +2274,10 @@
                 <a:ea typeface="Be Vietnam Pro" pitchFamily="34" charset="-122"/>
                 <a:cs typeface="Be Vietnam Pro" pitchFamily="34" charset="-120"/>
               </a:rPr>
-              <a:t> Quan</a:t>
-            </a:r>
-            <a:r>
-              <a:rPr lang="en-US" sz="1650" dirty="0" spc="-9" kern="0">
+              <a:t> DevOps</a:t>
+            </a:r>
+            <a:r>
+              <a:rPr lang="en-US" sz="1650" dirty="0" spc="-7" kern="0">
                 <a:solidFill>
                   <a:srgbClr val="9AA0B5"/>
                 </a:solidFill>
@@ -2296,7 +2285,7 @@
                 <a:ea typeface="Be Vietnam Pro" pitchFamily="34" charset="-122"/>
                 <a:cs typeface="Be Vietnam Pro" pitchFamily="34" charset="-120"/>
               </a:rPr>
-              <a:t> sát</a:t>
+              <a:t> và</a:t>
             </a:r>
             <a:r>
               <a:rPr lang="en-US" sz="1650" dirty="0" spc="3" kern="0">
@@ -2307,18 +2296,7 @@
                 <a:ea typeface="Be Vietnam Pro" pitchFamily="34" charset="-122"/>
                 <a:cs typeface="Be Vietnam Pro" pitchFamily="34" charset="-120"/>
               </a:rPr>
-              <a:t> hệ</a:t>
-            </a:r>
-            <a:r>
-              <a:rPr lang="en-US" sz="1650" dirty="0" spc="1" kern="0">
-                <a:solidFill>
-                  <a:srgbClr val="9AA0B5"/>
-                </a:solidFill>
-                <a:latin typeface="Be Vietnam Pro" pitchFamily="34" charset="0"/>
-                <a:ea typeface="Be Vietnam Pro" pitchFamily="34" charset="-122"/>
-                <a:cs typeface="Be Vietnam Pro" pitchFamily="34" charset="-120"/>
-              </a:rPr>
-              <a:t> thống</a:t>
+              <a:t> CI/CD</a:t>
             </a:r>
             <a:endParaRPr lang="en-US" sz="1650" dirty="0"/>
           </a:p>
@@ -2495,7 +2473,7 @@
         <p:spPr>
           <a:xfrm>
             <a:off x="914400" y="1333500"/>
-            <a:ext cx="16459200" cy="1143000"/>
+            <a:ext cx="16459200" cy="1047750"/>
           </a:xfrm>
           <a:prstGeom prst="rect">
             <a:avLst/>
@@ -2511,7 +2489,7 @@
               <a:buNone/>
             </a:pPr>
             <a:r>
-              <a:rPr lang="en-US" sz="6300" dirty="0" spc="-1" kern="0">
+              <a:rPr lang="en-US" sz="6900" dirty="0" spc="-2" kern="0">
                 <a:solidFill>
                   <a:srgbClr val="14161C"/>
                 </a:solidFill>
@@ -2522,7 +2500,7 @@
               <a:t>Hai</a:t>
             </a:r>
             <a:r>
-              <a:rPr lang="en-US" sz="6300" dirty="0" spc="5" kern="0">
+              <a:rPr lang="en-US" sz="6900" dirty="0" spc="7" kern="0">
                 <a:solidFill>
                   <a:srgbClr val="14161C"/>
                 </a:solidFill>
@@ -2533,7 +2511,7 @@
               <a:t> trục</a:t>
             </a:r>
             <a:r>
-              <a:rPr lang="en-US" sz="6300" dirty="0" spc="13" kern="0">
+              <a:rPr lang="en-US" sz="6900" dirty="0" spc="11" kern="0">
                 <a:solidFill>
                   <a:srgbClr val="14161C"/>
                 </a:solidFill>
@@ -2544,7 +2522,7 @@
               <a:t> độc</a:t>
             </a:r>
             <a:r>
-              <a:rPr lang="en-US" sz="6300" dirty="0" spc="1" kern="0">
+              <a:rPr lang="en-US" sz="6900" dirty="0" spc="-1" kern="0">
                 <a:solidFill>
                   <a:srgbClr val="14161C"/>
                 </a:solidFill>
@@ -2552,10 +2530,10 @@
                 <a:ea typeface="Bricolage Grotesque ExtraBold" pitchFamily="34" charset="-122"/>
                 <a:cs typeface="Bricolage Grotesque ExtraBold" pitchFamily="34" charset="-120"/>
               </a:rPr>
-              <a:t> lập:</a:t>
-            </a:r>
-            <a:r>
-              <a:rPr lang="en-US" sz="6300" dirty="0" spc="0" kern="0">
+              <a:t> lập</a:t>
+            </a:r>
+            <a:r>
+              <a:rPr lang="en-US" sz="6900" dirty="0" spc="3" kern="0">
                 <a:solidFill>
                   <a:srgbClr val="14161C"/>
                 </a:solidFill>
@@ -2563,42 +2541,9 @@
                 <a:ea typeface="Bricolage Grotesque ExtraBold" pitchFamily="34" charset="-122"/>
                 <a:cs typeface="Bricolage Grotesque ExtraBold" pitchFamily="34" charset="-120"/>
               </a:rPr>
-              <a:t> chọn</a:t>
-            </a:r>
-            <a:r>
-              <a:rPr lang="en-US" sz="6300" dirty="0" spc="-6" kern="0">
-                <a:solidFill>
-                  <a:srgbClr val="14161C"/>
-                </a:solidFill>
-                <a:latin typeface="Bricolage Grotesque ExtraBold" pitchFamily="34" charset="0"/>
-                <a:ea typeface="Bricolage Grotesque ExtraBold" pitchFamily="34" charset="-122"/>
-                <a:cs typeface="Bricolage Grotesque ExtraBold" pitchFamily="34" charset="-120"/>
-              </a:rPr>
-              <a:t> một</a:t>
-            </a:r>
-            <a:r>
-              <a:rPr lang="en-US" sz="6300" dirty="0" spc="1" kern="0">
-                <a:solidFill>
-                  <a:srgbClr val="14161C"/>
-                </a:solidFill>
-                <a:latin typeface="Bricolage Grotesque ExtraBold" pitchFamily="34" charset="0"/>
-                <a:ea typeface="Bricolage Grotesque ExtraBold" pitchFamily="34" charset="-122"/>
-                <a:cs typeface="Bricolage Grotesque ExtraBold" pitchFamily="34" charset="-120"/>
-              </a:rPr>
-              <a:t> ô mỗi</a:t>
-            </a:r>
-            <a:r>
-              <a:rPr lang="en-US" sz="6300" dirty="0" spc="6" kern="0">
-                <a:solidFill>
-                  <a:srgbClr val="14161C"/>
-                </a:solidFill>
-                <a:latin typeface="Bricolage Grotesque ExtraBold" pitchFamily="34" charset="0"/>
-                <a:ea typeface="Bricolage Grotesque ExtraBold" pitchFamily="34" charset="-122"/>
-                <a:cs typeface="Bricolage Grotesque ExtraBold" pitchFamily="34" charset="-120"/>
-              </a:rPr>
-              <a:t> trục</a:t>
-            </a:r>
-            <a:endParaRPr lang="en-US" sz="6300" dirty="0"/>
+              <a:t> nhau</a:t>
+            </a:r>
+            <a:endParaRPr lang="en-US" sz="6900" dirty="0"/>
           </a:p>
         </p:txBody>
       </p:sp>
@@ -5133,7 +5078,7 @@
         <p:spPr>
           <a:xfrm>
             <a:off x="914400" y="1333500"/>
-            <a:ext cx="16459200" cy="1238250"/>
+            <a:ext cx="16459200" cy="1047750"/>
           </a:xfrm>
           <a:prstGeom prst="rect">
             <a:avLst/>
@@ -5149,7 +5094,7 @@
               <a:buNone/>
             </a:pPr>
             <a:r>
-              <a:rPr lang="en-US" sz="6600" dirty="0" spc="-10" kern="0">
+              <a:rPr lang="en-US" sz="6900" dirty="0" spc="-7" kern="0">
                 <a:solidFill>
                   <a:srgbClr val="14161C"/>
                 </a:solidFill>
@@ -5160,7 +5105,7 @@
               <a:t>Ai</a:t>
             </a:r>
             <a:r>
-              <a:rPr lang="en-US" sz="6600" dirty="0" spc="-12" kern="0">
+              <a:rPr lang="en-US" sz="6900" dirty="0" spc="-13" kern="0">
                 <a:solidFill>
                   <a:srgbClr val="14161C"/>
                 </a:solidFill>
@@ -5171,7 +5116,7 @@
               <a:t> trong</a:t>
             </a:r>
             <a:r>
-              <a:rPr lang="en-US" sz="6600" dirty="0" spc="1" kern="0">
+              <a:rPr lang="en-US" sz="6900" dirty="0" spc="0" kern="0">
                 <a:solidFill>
                   <a:srgbClr val="14161C"/>
                 </a:solidFill>
@@ -5182,7 +5127,7 @@
               <a:t> nhóm</a:t>
             </a:r>
             <a:r>
-              <a:rPr lang="en-US" sz="6600" dirty="0" spc="-5" kern="0">
+              <a:rPr lang="en-US" sz="6900" dirty="0" spc="-7" kern="0">
                 <a:solidFill>
                   <a:srgbClr val="14161C"/>
                 </a:solidFill>
@@ -5193,7 +5138,7 @@
               <a:t> xử</a:t>
             </a:r>
             <a:r>
-              <a:rPr lang="en-US" sz="6600" dirty="0" spc="-3" kern="0">
+              <a:rPr lang="en-US" sz="6900" dirty="0" spc="-1" kern="0">
                 <a:solidFill>
                   <a:srgbClr val="14161C"/>
                 </a:solidFill>
@@ -5204,7 +5149,7 @@
               <a:t> lý</a:t>
             </a:r>
             <a:r>
-              <a:rPr lang="en-US" sz="6600" dirty="0" spc="1" kern="0">
+              <a:rPr lang="en-US" sz="6900" dirty="0" spc="3" kern="0">
                 <a:solidFill>
                   <a:srgbClr val="14161C"/>
                 </a:solidFill>
@@ -5215,7 +5160,7 @@
               <a:t> phần</a:t>
             </a:r>
             <a:r>
-              <a:rPr lang="en-US" sz="6600" dirty="0" spc="0" kern="0">
+              <a:rPr lang="en-US" sz="6900" dirty="0" spc="-1" kern="0">
                 <a:solidFill>
                   <a:srgbClr val="14161C"/>
                 </a:solidFill>
@@ -5226,7 +5171,7 @@
               <a:t> còn</a:t>
             </a:r>
             <a:r>
-              <a:rPr lang="en-US" sz="6600" dirty="0" spc="8" kern="0">
+              <a:rPr lang="en-US" sz="6900" dirty="0" spc="11" kern="0">
                 <a:solidFill>
                   <a:srgbClr val="14161C"/>
                 </a:solidFill>
@@ -5236,7 +5181,7 @@
               </a:rPr>
               <a:t> lại?</a:t>
             </a:r>
-            <a:endParaRPr lang="en-US" sz="6600" dirty="0"/>
+            <a:endParaRPr lang="en-US" sz="6900" dirty="0"/>
           </a:p>
         </p:txBody>
       </p:sp>
@@ -7797,7 +7742,7 @@
         <p:spPr>
           <a:xfrm>
             <a:off x="914400" y="1333500"/>
-            <a:ext cx="16459200" cy="1238250"/>
+            <a:ext cx="16459200" cy="1047750"/>
           </a:xfrm>
           <a:prstGeom prst="rect">
             <a:avLst/>
@@ -7806,17 +7751,17 @@
           <a:ln/>
         </p:spPr>
         <p:txBody>
-          <a:bodyPr wrap="square" lIns="0" tIns="28080" rIns="0" bIns="-28080" rtlCol="0" anchor="t"/>
+          <a:bodyPr wrap="square" lIns="0" tIns="43815" rIns="0" bIns="-43815" rtlCol="0" anchor="t"/>
           <a:lstStyle/>
           <a:p>
             <a:pPr algn="l" indent="0" marL="0">
               <a:lnSpc>
-                <a:spcPts val="4863"/>
+                <a:spcPts val="7590"/>
               </a:lnSpc>
               <a:buNone/>
             </a:pPr>
             <a:r>
-              <a:rPr lang="en-US" sz="4421" dirty="0" spc="2" kern="0">
+              <a:rPr lang="en-US" sz="6900" dirty="0" spc="-2" kern="0">
                 <a:solidFill>
                   <a:srgbClr val="14161C"/>
                 </a:solidFill>
@@ -7824,10 +7769,10 @@
                 <a:ea typeface="Bricolage Grotesque ExtraBold" pitchFamily="34" charset="-122"/>
                 <a:cs typeface="Bricolage Grotesque ExtraBold" pitchFamily="34" charset="-120"/>
               </a:rPr>
-              <a:t>Hàm</a:t>
-            </a:r>
-            <a:r>
-              <a:rPr lang="en-US" sz="4421" dirty="0" spc="-7" kern="0">
+              <a:t>Bản</a:t>
+            </a:r>
+            <a:r>
+              <a:rPr lang="en-US" sz="6900" dirty="0" spc="-76" kern="0">
                 <a:solidFill>
                   <a:srgbClr val="14161C"/>
                 </a:solidFill>
@@ -7835,10 +7780,10 @@
                 <a:ea typeface="Bricolage Grotesque ExtraBold" pitchFamily="34" charset="-122"/>
                 <a:cs typeface="Bricolage Grotesque ExtraBold" pitchFamily="34" charset="-120"/>
               </a:rPr>
-              <a:t> serverless</a:t>
-            </a:r>
-            <a:r>
-              <a:rPr lang="en-US" sz="4421" dirty="0" spc="-1" kern="0">
+              <a:t> vá</a:t>
+            </a:r>
+            <a:r>
+              <a:rPr lang="en-US" sz="6900" dirty="0" spc="1" kern="0">
                 <a:solidFill>
                   <a:srgbClr val="14161C"/>
                 </a:solidFill>
@@ -7846,10 +7791,10 @@
                 <a:ea typeface="Bricolage Grotesque ExtraBold" pitchFamily="34" charset="-122"/>
                 <a:cs typeface="Bricolage Grotesque ExtraBold" pitchFamily="34" charset="-120"/>
               </a:rPr>
-              <a:t> dùng</a:t>
-            </a:r>
-            <a:r>
-              <a:rPr lang="en-US" sz="4421" dirty="0" spc="-2" kern="0">
+              <a:t> ảnh</a:t>
+            </a:r>
+            <a:r>
+              <a:rPr lang="en-US" sz="6900" dirty="0" spc="-2" kern="0">
                 <a:solidFill>
                   <a:srgbClr val="14161C"/>
                 </a:solidFill>
@@ -7857,10 +7802,10 @@
                 <a:ea typeface="Bricolage Grotesque ExtraBold" pitchFamily="34" charset="-122"/>
                 <a:cs typeface="Bricolage Grotesque ExtraBold" pitchFamily="34" charset="-120"/>
               </a:rPr>
-              <a:t> container</a:t>
-            </a:r>
-            <a:r>
-              <a:rPr lang="en-US" sz="4421" dirty="0" spc="-17" kern="0">
+              <a:t> cơ</a:t>
+            </a:r>
+            <a:r>
+              <a:rPr lang="en-US" sz="6900" dirty="0" spc="-60" kern="0">
                 <a:solidFill>
                   <a:srgbClr val="14161C"/>
                 </a:solidFill>
@@ -7868,10 +7813,10 @@
                 <a:ea typeface="Bricolage Grotesque ExtraBold" pitchFamily="34" charset="-122"/>
                 <a:cs typeface="Bricolage Grotesque ExtraBold" pitchFamily="34" charset="-120"/>
               </a:rPr>
-              <a:t> image</a:t>
-            </a:r>
-            <a:r>
-              <a:rPr lang="en-US" sz="4421" dirty="0" spc="-4" kern="0">
+              <a:t> sở:</a:t>
+            </a:r>
+            <a:r>
+              <a:rPr lang="en-US" sz="6900" dirty="0" spc="0" kern="0">
                 <a:solidFill>
                   <a:srgbClr val="14161C"/>
                 </a:solidFill>
@@ -7879,10 +7824,10 @@
                 <a:ea typeface="Bricolage Grotesque ExtraBold" pitchFamily="34" charset="-122"/>
                 <a:cs typeface="Bricolage Grotesque ExtraBold" pitchFamily="34" charset="-120"/>
               </a:rPr>
-              <a:t> có</a:t>
-            </a:r>
-            <a:r>
-              <a:rPr lang="en-US" sz="4421" dirty="0" spc="-5" kern="0">
+              <a:t> ai</a:t>
+            </a:r>
+            <a:r>
+              <a:rPr lang="en-US" sz="6900" dirty="0" spc="-2" kern="0">
                 <a:solidFill>
                   <a:srgbClr val="14161C"/>
                 </a:solidFill>
@@ -7890,10 +7835,10 @@
                 <a:ea typeface="Bricolage Grotesque ExtraBold" pitchFamily="34" charset="-122"/>
                 <a:cs typeface="Bricolage Grotesque ExtraBold" pitchFamily="34" charset="-120"/>
               </a:rPr>
-              <a:t> bản</a:t>
-            </a:r>
-            <a:r>
-              <a:rPr lang="en-US" sz="4421" dirty="0" spc="-45" kern="0">
+              <a:t> cập</a:t>
+            </a:r>
+            <a:r>
+              <a:rPr lang="en-US" sz="6900" dirty="0" spc="0" kern="0">
                 <a:solidFill>
                   <a:srgbClr val="14161C"/>
                 </a:solidFill>
@@ -7901,64 +7846,9 @@
                 <a:ea typeface="Bricolage Grotesque ExtraBold" pitchFamily="34" charset="-122"/>
                 <a:cs typeface="Bricolage Grotesque ExtraBold" pitchFamily="34" charset="-120"/>
               </a:rPr>
-              <a:t> vá</a:t>
-            </a:r>
-            <a:r>
-              <a:rPr lang="en-US" sz="4421" dirty="0" spc="-2" kern="0">
-                <a:solidFill>
-                  <a:srgbClr val="14161C"/>
-                </a:solidFill>
-                <a:latin typeface="Bricolage Grotesque ExtraBold" pitchFamily="34" charset="0"/>
-                <a:ea typeface="Bricolage Grotesque ExtraBold" pitchFamily="34" charset="-122"/>
-                <a:cs typeface="Bricolage Grotesque ExtraBold" pitchFamily="34" charset="-120"/>
-              </a:rPr>
-              <a:t> ảnh cơ</a:t>
-            </a:r>
-            <a:r>
-              <a:rPr lang="en-US" sz="4421" dirty="0" spc="-44" kern="0">
-                <a:solidFill>
-                  <a:srgbClr val="14161C"/>
-                </a:solidFill>
-                <a:latin typeface="Bricolage Grotesque ExtraBold" pitchFamily="34" charset="0"/>
-                <a:ea typeface="Bricolage Grotesque ExtraBold" pitchFamily="34" charset="-122"/>
-                <a:cs typeface="Bricolage Grotesque ExtraBold" pitchFamily="34" charset="-120"/>
-              </a:rPr>
-              <a:t> sở.</a:t>
-            </a:r>
-            <a:r>
-              <a:rPr lang="en-US" sz="4421" dirty="0" spc="-4" kern="0">
-                <a:solidFill>
-                  <a:srgbClr val="14161C"/>
-                </a:solidFill>
-                <a:latin typeface="Bricolage Grotesque ExtraBold" pitchFamily="34" charset="0"/>
-                <a:ea typeface="Bricolage Grotesque ExtraBold" pitchFamily="34" charset="-122"/>
-                <a:cs typeface="Bricolage Grotesque ExtraBold" pitchFamily="34" charset="-120"/>
-              </a:rPr>
-              <a:t> Ai</a:t>
-            </a:r>
-            <a:r>
-              <a:rPr lang="en-US" sz="4421" dirty="0" spc="-2" kern="0">
-                <a:solidFill>
-                  <a:srgbClr val="14161C"/>
-                </a:solidFill>
-                <a:latin typeface="Bricolage Grotesque ExtraBold" pitchFamily="34" charset="0"/>
-                <a:ea typeface="Bricolage Grotesque ExtraBold" pitchFamily="34" charset="-122"/>
-                <a:cs typeface="Bricolage Grotesque ExtraBold" pitchFamily="34" charset="-120"/>
-              </a:rPr>
-              <a:t> cập</a:t>
-            </a:r>
-            <a:r>
-              <a:rPr lang="en-US" sz="4421" dirty="0" spc="-1" kern="0">
-                <a:solidFill>
-                  <a:srgbClr val="14161C"/>
-                </a:solidFill>
-                <a:latin typeface="Bricolage Grotesque ExtraBold" pitchFamily="34" charset="0"/>
-                <a:ea typeface="Bricolage Grotesque ExtraBold" pitchFamily="34" charset="-122"/>
-                <a:cs typeface="Bricolage Grotesque ExtraBold" pitchFamily="34" charset="-120"/>
-              </a:rPr>
               <a:t> nhật?</a:t>
             </a:r>
-            <a:endParaRPr lang="en-US" sz="4421" dirty="0"/>
+            <a:endParaRPr lang="en-US" sz="6900" dirty="0"/>
           </a:p>
         </p:txBody>
       </p:sp>
@@ -9433,7 +9323,7 @@
         <p:spPr>
           <a:xfrm>
             <a:off x="914400" y="1333500"/>
-            <a:ext cx="16459200" cy="1143000"/>
+            <a:ext cx="16459200" cy="1047750"/>
           </a:xfrm>
           <a:prstGeom prst="rect">
             <a:avLst/>
@@ -9449,7 +9339,7 @@
               <a:buNone/>
             </a:pPr>
             <a:r>
-              <a:rPr lang="en-US" sz="6600" dirty="0" spc="2" kern="0">
+              <a:rPr lang="en-US" sz="6900" dirty="0" spc="-2" kern="0">
                 <a:solidFill>
                   <a:srgbClr val="14161C"/>
                 </a:solidFill>
@@ -9460,7 +9350,7 @@
               <a:t>Mô</a:t>
             </a:r>
             <a:r>
-              <a:rPr lang="en-US" sz="6600" dirty="0" spc="-16" kern="0">
+              <a:rPr lang="en-US" sz="6900" dirty="0" spc="-13" kern="0">
                 <a:solidFill>
                   <a:srgbClr val="14161C"/>
                 </a:solidFill>
@@ -9471,7 +9361,7 @@
               <a:t> hình</a:t>
             </a:r>
             <a:r>
-              <a:rPr lang="en-US" sz="6600" dirty="0" spc="-19" kern="0">
+              <a:rPr lang="en-US" sz="6900" dirty="0" spc="-21" kern="0">
                 <a:solidFill>
                   <a:srgbClr val="14161C"/>
                 </a:solidFill>
@@ -9482,7 +9372,7 @@
               <a:t> trách</a:t>
             </a:r>
             <a:r>
-              <a:rPr lang="en-US" sz="6600" dirty="0" spc="0" kern="0">
+              <a:rPr lang="en-US" sz="6900" dirty="0" spc="4" kern="0">
                 <a:solidFill>
                   <a:srgbClr val="14161C"/>
                 </a:solidFill>
@@ -9493,7 +9383,7 @@
               <a:t> nhiệm</a:t>
             </a:r>
             <a:r>
-              <a:rPr lang="en-US" sz="6600" dirty="0" spc="-3" kern="0">
+              <a:rPr lang="en-US" sz="6900" dirty="0" spc="0" kern="0">
                 <a:solidFill>
                   <a:srgbClr val="14161C"/>
                 </a:solidFill>
@@ -9504,7 +9394,7 @@
               <a:t> chia</a:t>
             </a:r>
             <a:r>
-              <a:rPr lang="en-US" sz="6600" dirty="0" spc="-2" kern="0">
+              <a:rPr lang="en-US" sz="6900" dirty="0" spc="3" kern="0">
                 <a:solidFill>
                   <a:srgbClr val="14161C"/>
                 </a:solidFill>
@@ -9514,7 +9404,7 @@
               </a:rPr>
               <a:t> sẻ</a:t>
             </a:r>
-            <a:endParaRPr lang="en-US" sz="6600" dirty="0"/>
+            <a:endParaRPr lang="en-US" sz="6900" dirty="0"/>
           </a:p>
         </p:txBody>
       </p:sp>
@@ -10770,7 +10660,7 @@
         <p:spPr>
           <a:xfrm>
             <a:off x="914400" y="1333500"/>
-            <a:ext cx="16192500" cy="952500"/>
+            <a:ext cx="16192500" cy="1047750"/>
           </a:xfrm>
           <a:prstGeom prst="rect">
             <a:avLst/>
@@ -10786,7 +10676,7 @@
               <a:buNone/>
             </a:pPr>
             <a:r>
-              <a:rPr lang="en-US" sz="6000" dirty="0" spc="-73" kern="0">
+              <a:rPr lang="en-US" sz="6900" dirty="0" spc="-83" kern="0">
                 <a:solidFill>
                   <a:srgbClr val="F3EEE3"/>
                 </a:solidFill>
@@ -10797,7 +10687,7 @@
               <a:t>Tra</a:t>
             </a:r>
             <a:r>
-              <a:rPr lang="en-US" sz="6000" dirty="0" spc="2" kern="0">
+              <a:rPr lang="en-US" sz="6900" dirty="0" spc="0" kern="0">
                 <a:solidFill>
                   <a:srgbClr val="F3EEE3"/>
                 </a:solidFill>
@@ -10808,7 +10698,7 @@
               <a:t> lại</a:t>
             </a:r>
             <a:r>
-              <a:rPr lang="en-US" sz="6000" dirty="0" spc="1" kern="0">
+              <a:rPr lang="en-US" sz="6900" dirty="0" spc="1" kern="0">
                 <a:solidFill>
                   <a:srgbClr val="F3EEE3"/>
                 </a:solidFill>
@@ -10819,7 +10709,7 @@
               <a:t> khi</a:t>
             </a:r>
             <a:r>
-              <a:rPr lang="en-US" sz="6000" dirty="0" spc="-1" kern="0">
+              <a:rPr lang="en-US" sz="6900" dirty="0" spc="-2" kern="0">
                 <a:solidFill>
                   <a:srgbClr val="F3EEE3"/>
                 </a:solidFill>
@@ -10829,7 +10719,7 @@
               </a:rPr>
               <a:t> cần</a:t>
             </a:r>
-            <a:endParaRPr lang="en-US" sz="6000" dirty="0"/>
+            <a:endParaRPr lang="en-US" sz="6900" dirty="0"/>
           </a:p>
         </p:txBody>
       </p:sp>

--- a/system-design-101/vi/lessons/sd-13-023/slides/sd-13-023.pptx
+++ b/system-design-101/vi/lessons/sd-13-023/slides/sd-13-023.pptx
@@ -3282,7 +3282,7 @@
               <a:buNone/>
             </a:pPr>
             <a:r>
-              <a:rPr lang="en-US" sz="2400" dirty="0" spc="-5" kern="0">
+              <a:rPr lang="en-US" sz="2550" dirty="0" spc="-6" kern="0">
                 <a:solidFill>
                   <a:srgbClr val="6B6A66"/>
                 </a:solidFill>
@@ -3293,7 +3293,7 @@
               <a:t>Ô</a:t>
             </a:r>
             <a:r>
-              <a:rPr lang="en-US" sz="2400" dirty="0" spc="3" kern="0">
+              <a:rPr lang="en-US" sz="2550" dirty="0" spc="0" kern="0">
                 <a:solidFill>
                   <a:srgbClr val="6B6A66"/>
                 </a:solidFill>
@@ -3304,7 +3304,7 @@
               <a:t> nào</a:t>
             </a:r>
             <a:r>
-              <a:rPr lang="en-US" sz="2400" dirty="0" spc="2" kern="0">
+              <a:rPr lang="en-US" sz="2550" dirty="0" spc="-1" kern="0">
                 <a:solidFill>
                   <a:srgbClr val="6B6A66"/>
                 </a:solidFill>
@@ -3315,7 +3315,7 @@
               <a:t> cũng</a:t>
             </a:r>
             <a:r>
-              <a:rPr lang="en-US" sz="2400" dirty="0" spc="6" kern="0">
+              <a:rPr lang="en-US" sz="2550" dirty="0" spc="5" kern="0">
                 <a:solidFill>
                   <a:srgbClr val="6B6A66"/>
                 </a:solidFill>
@@ -3326,7 +3326,7 @@
               <a:t> được;</a:t>
             </a:r>
             <a:r>
-              <a:rPr lang="en-US" sz="2400" dirty="0" spc="1" kern="0">
+              <a:rPr lang="en-US" sz="2550" dirty="0" spc="0" kern="0">
                 <a:solidFill>
                   <a:srgbClr val="6B6A66"/>
                 </a:solidFill>
@@ -3337,7 +3337,7 @@
               <a:t> phần</a:t>
             </a:r>
             <a:r>
-              <a:rPr lang="en-US" sz="2400" dirty="0" spc="-5" kern="0">
+              <a:rPr lang="en-US" sz="2550" dirty="0" spc="-4" kern="0">
                 <a:solidFill>
                   <a:srgbClr val="6B6A66"/>
                 </a:solidFill>
@@ -3348,7 +3348,7 @@
               <a:t> việc</a:t>
             </a:r>
             <a:r>
-              <a:rPr lang="en-US" sz="2400" dirty="0" spc="0" kern="0">
+              <a:rPr lang="en-US" sz="2550" dirty="0" spc="1" kern="0">
                 <a:solidFill>
                   <a:srgbClr val="6B6A66"/>
                 </a:solidFill>
@@ -3359,7 +3359,7 @@
               <a:t> chung</a:t>
             </a:r>
             <a:r>
-              <a:rPr lang="en-US" sz="2400" dirty="0" spc="-11" kern="0">
+              <a:rPr lang="en-US" sz="2550" dirty="0" spc="-14" kern="0">
                 <a:solidFill>
                   <a:srgbClr val="6B6A66"/>
                 </a:solidFill>
@@ -3370,7 +3370,7 @@
               <a:t> vẫn</a:t>
             </a:r>
             <a:r>
-              <a:rPr lang="en-US" sz="2400" dirty="0" spc="0" kern="0">
+              <a:rPr lang="en-US" sz="2550" dirty="0" spc="0" kern="0">
                 <a:solidFill>
                   <a:srgbClr val="6B6A66"/>
                 </a:solidFill>
@@ -3378,10 +3378,10 @@
                 <a:ea typeface="Be Vietnam Pro" pitchFamily="34" charset="-122"/>
                 <a:cs typeface="Be Vietnam Pro" pitchFamily="34" charset="-120"/>
               </a:rPr>
-              <a:t> còn cho</a:t>
-            </a:r>
-            <a:r>
-              <a:rPr lang="en-US" sz="2400" dirty="0" spc="-1" kern="0">
+              <a:t> còn</a:t>
+            </a:r>
+            <a:r>
+              <a:rPr lang="en-US" sz="2550" dirty="0" spc="-1" kern="0">
                 <a:solidFill>
                   <a:srgbClr val="6B6A66"/>
                 </a:solidFill>
@@ -3389,9 +3389,20 @@
                 <a:ea typeface="Be Vietnam Pro" pitchFamily="34" charset="-122"/>
                 <a:cs typeface="Be Vietnam Pro" pitchFamily="34" charset="-120"/>
               </a:rPr>
+              <a:t> cho</a:t>
+            </a:r>
+            <a:r>
+              <a:rPr lang="en-US" sz="2550" dirty="0" spc="-2" kern="0">
+                <a:solidFill>
+                  <a:srgbClr val="6B6A66"/>
+                </a:solidFill>
+                <a:latin typeface="Be Vietnam Pro" pitchFamily="34" charset="0"/>
+                <a:ea typeface="Be Vietnam Pro" pitchFamily="34" charset="-122"/>
+                <a:cs typeface="Be Vietnam Pro" pitchFamily="34" charset="-120"/>
+              </a:rPr>
               <a:t> bạn.</a:t>
             </a:r>
-            <a:endParaRPr lang="en-US" sz="2400" dirty="0"/>
+            <a:endParaRPr lang="en-US" sz="2550" dirty="0"/>
           </a:p>
         </p:txBody>
       </p:sp>
@@ -9786,7 +9797,7 @@
               <a:buNone/>
             </a:pPr>
             <a:r>
-              <a:rPr lang="en-US" sz="2400" dirty="0" spc="-29" kern="0">
+              <a:rPr lang="en-US" sz="2550" dirty="0" spc="-32" kern="0">
                 <a:solidFill>
                   <a:srgbClr val="6B6A66"/>
                 </a:solidFill>
@@ -9797,7 +9808,7 @@
               <a:t>Ranh</a:t>
             </a:r>
             <a:r>
-              <a:rPr lang="en-US" sz="2400" dirty="0" spc="1" kern="0">
+              <a:rPr lang="en-US" sz="2550" dirty="0" spc="0" kern="0">
                 <a:solidFill>
                   <a:srgbClr val="6B6A66"/>
                 </a:solidFill>
@@ -9808,7 +9819,7 @@
               <a:t> giới</a:t>
             </a:r>
             <a:r>
-              <a:rPr lang="en-US" sz="2400" dirty="0" spc="12" kern="0">
+              <a:rPr lang="en-US" sz="2550" dirty="0" spc="12" kern="0">
                 <a:solidFill>
                   <a:srgbClr val="6B6A66"/>
                 </a:solidFill>
@@ -9819,7 +9830,7 @@
               <a:t> đổi</a:t>
             </a:r>
             <a:r>
-              <a:rPr lang="en-US" sz="2400" dirty="0" spc="-1" kern="0">
+              <a:rPr lang="en-US" sz="2550" dirty="0" spc="-2" kern="0">
                 <a:solidFill>
                   <a:srgbClr val="6B6A66"/>
                 </a:solidFill>
@@ -9830,7 +9841,7 @@
               <a:t> theo</a:t>
             </a:r>
             <a:r>
-              <a:rPr lang="en-US" sz="2400" dirty="0" spc="0" kern="0">
+              <a:rPr lang="en-US" sz="2550" dirty="0" spc="1" kern="0">
                 <a:solidFill>
                   <a:srgbClr val="6B6A66"/>
                 </a:solidFill>
@@ -9841,7 +9852,7 @@
               <a:t> dịch</a:t>
             </a:r>
             <a:r>
-              <a:rPr lang="en-US" sz="2400" dirty="0" spc="1" kern="0">
+              <a:rPr lang="en-US" sz="2550" dirty="0" spc="-5" kern="0">
                 <a:solidFill>
                   <a:srgbClr val="6B6A66"/>
                 </a:solidFill>
@@ -9852,7 +9863,7 @@
               <a:t> vụ</a:t>
             </a:r>
             <a:r>
-              <a:rPr lang="en-US" sz="2400" dirty="0" spc="7" kern="0">
+              <a:rPr lang="en-US" sz="2550" dirty="0" spc="7" kern="0">
                 <a:solidFill>
                   <a:srgbClr val="6B6A66"/>
                 </a:solidFill>
@@ -9863,7 +9874,7 @@
               <a:t> được</a:t>
             </a:r>
             <a:r>
-              <a:rPr lang="en-US" sz="2400" dirty="0" spc="-1" kern="0">
+              <a:rPr lang="en-US" sz="2550" dirty="0" spc="0" kern="0">
                 <a:solidFill>
                   <a:srgbClr val="6B6A66"/>
                 </a:solidFill>
@@ -9873,7 +9884,7 @@
               </a:rPr>
               <a:t> chọn.</a:t>
             </a:r>
-            <a:endParaRPr lang="en-US" sz="2400" dirty="0"/>
+            <a:endParaRPr lang="en-US" sz="2550" dirty="0"/>
           </a:p>
         </p:txBody>
       </p:sp>

--- a/system-design-101/vi/lessons/sd-13-023/slides/sd-13-023.pptx
+++ b/system-design-101/vi/lessons/sd-13-023/slides/sd-13-023.pptx
@@ -3326,6 +3326,39 @@
               <a:t> được;</a:t>
             </a:r>
             <a:r>
+              <a:rPr lang="en-US" sz="2550" dirty="0" spc="-3" kern="0">
+                <a:solidFill>
+                  <a:srgbClr val="6B6A66"/>
+                </a:solidFill>
+                <a:latin typeface="Be Vietnam Pro" pitchFamily="34" charset="0"/>
+                <a:ea typeface="Be Vietnam Pro" pitchFamily="34" charset="-122"/>
+                <a:cs typeface="Be Vietnam Pro" pitchFamily="34" charset="-120"/>
+              </a:rPr>
+              <a:t> bạn</a:t>
+            </a:r>
+            <a:r>
+              <a:rPr lang="en-US" sz="2550" dirty="0" spc="-14" kern="0">
+                <a:solidFill>
+                  <a:srgbClr val="6B6A66"/>
+                </a:solidFill>
+                <a:latin typeface="Be Vietnam Pro" pitchFamily="34" charset="0"/>
+                <a:ea typeface="Be Vietnam Pro" pitchFamily="34" charset="-122"/>
+                <a:cs typeface="Be Vietnam Pro" pitchFamily="34" charset="-120"/>
+              </a:rPr>
+              <a:t> vẫn</a:t>
+            </a:r>
+            <a:r>
+              <a:rPr lang="en-US" sz="2550" dirty="0" spc="-1" kern="0">
+                <a:solidFill>
+                  <a:srgbClr val="6B6A66"/>
+                </a:solidFill>
+                <a:latin typeface="Be Vietnam Pro" pitchFamily="34" charset="0"/>
+                <a:ea typeface="Be Vietnam Pro" pitchFamily="34" charset="-122"/>
+                <a:cs typeface="Be Vietnam Pro" pitchFamily="34" charset="-120"/>
+              </a:rPr>
+              <a:t> còn</a:t>
+            </a:r>
+            <a:r>
               <a:rPr lang="en-US" sz="2550" dirty="0" spc="0" kern="0">
                 <a:solidFill>
                   <a:srgbClr val="6B6A66"/>
@@ -3348,7 +3381,7 @@
               <a:t> việc</a:t>
             </a:r>
             <a:r>
-              <a:rPr lang="en-US" sz="2550" dirty="0" spc="1" kern="0">
+              <a:rPr lang="en-US" sz="2550" dirty="0" spc="2" kern="0">
                 <a:solidFill>
                   <a:srgbClr val="6B6A66"/>
                 </a:solidFill>
@@ -3356,51 +3389,7 @@
                 <a:ea typeface="Be Vietnam Pro" pitchFamily="34" charset="-122"/>
                 <a:cs typeface="Be Vietnam Pro" pitchFamily="34" charset="-120"/>
               </a:rPr>
-              <a:t> chung</a:t>
-            </a:r>
-            <a:r>
-              <a:rPr lang="en-US" sz="2550" dirty="0" spc="-14" kern="0">
-                <a:solidFill>
-                  <a:srgbClr val="6B6A66"/>
-                </a:solidFill>
-                <a:latin typeface="Be Vietnam Pro" pitchFamily="34" charset="0"/>
-                <a:ea typeface="Be Vietnam Pro" pitchFamily="34" charset="-122"/>
-                <a:cs typeface="Be Vietnam Pro" pitchFamily="34" charset="-120"/>
-              </a:rPr>
-              <a:t> vẫn</a:t>
-            </a:r>
-            <a:r>
-              <a:rPr lang="en-US" sz="2550" dirty="0" spc="0" kern="0">
-                <a:solidFill>
-                  <a:srgbClr val="6B6A66"/>
-                </a:solidFill>
-                <a:latin typeface="Be Vietnam Pro" pitchFamily="34" charset="0"/>
-                <a:ea typeface="Be Vietnam Pro" pitchFamily="34" charset="-122"/>
-                <a:cs typeface="Be Vietnam Pro" pitchFamily="34" charset="-120"/>
-              </a:rPr>
-              <a:t> còn</a:t>
-            </a:r>
-            <a:r>
-              <a:rPr lang="en-US" sz="2550" dirty="0" spc="-1" kern="0">
-                <a:solidFill>
-                  <a:srgbClr val="6B6A66"/>
-                </a:solidFill>
-                <a:latin typeface="Be Vietnam Pro" pitchFamily="34" charset="0"/>
-                <a:ea typeface="Be Vietnam Pro" pitchFamily="34" charset="-122"/>
-                <a:cs typeface="Be Vietnam Pro" pitchFamily="34" charset="-120"/>
-              </a:rPr>
-              <a:t> cho</a:t>
-            </a:r>
-            <a:r>
-              <a:rPr lang="en-US" sz="2550" dirty="0" spc="-2" kern="0">
-                <a:solidFill>
-                  <a:srgbClr val="6B6A66"/>
-                </a:solidFill>
-                <a:latin typeface="Be Vietnam Pro" pitchFamily="34" charset="0"/>
-                <a:ea typeface="Be Vietnam Pro" pitchFamily="34" charset="-122"/>
-                <a:cs typeface="Be Vietnam Pro" pitchFamily="34" charset="-120"/>
-              </a:rPr>
-              <a:t> bạn.</a:t>
+              <a:t> chung.</a:t>
             </a:r>
             <a:endParaRPr lang="en-US" sz="2550" dirty="0"/>
           </a:p>
@@ -4565,7 +4554,7 @@
               <a:t> điều</a:t>
             </a:r>
             <a:r>
-              <a:rPr lang="en-US" sz="2550" dirty="0" spc="-1" kern="0">
+              <a:rPr lang="en-US" sz="2550" dirty="0" spc="0" kern="0">
                 <a:solidFill>
                   <a:srgbClr val="E4E1D8"/>
                 </a:solidFill>
@@ -4573,10 +4562,19 @@
                 <a:ea typeface="Be Vietnam Pro" pitchFamily="34" charset="-122"/>
                 <a:cs typeface="Be Vietnam Pro" pitchFamily="34" charset="-120"/>
               </a:rPr>
-              <a:t> hành;</a:t>
-            </a:r>
-            <a:r>
-              <a:rPr lang="en-US" sz="2550" dirty="0" spc="-5" kern="0">
+              <a:t> hành.</a:t>
+            </a:r>
+            <a:endParaRPr lang="en-US" sz="2550" dirty="0"/>
+          </a:p>
+          <a:p>
+            <a:pPr algn="l" indent="0" marL="0">
+              <a:lnSpc>
+                <a:spcPts val="3443"/>
+              </a:lnSpc>
+              <a:buNone/>
+            </a:pPr>
+            <a:r>
+              <a:rPr lang="en-US" sz="2550" dirty="0" spc="-23" kern="0">
                 <a:solidFill>
                   <a:srgbClr val="E4E1D8"/>
                 </a:solidFill>
@@ -4584,10 +4582,10 @@
                 <a:ea typeface="Be Vietnam Pro" pitchFamily="34" charset="-122"/>
                 <a:cs typeface="Be Vietnam Pro" pitchFamily="34" charset="-120"/>
               </a:rPr>
-              <a:t> runtime</a:t>
-            </a:r>
-            <a:r>
-              <a:rPr lang="en-US" sz="2550" dirty="0" spc="-1" kern="0">
+              <a:t>Runtime</a:t>
+            </a:r>
+            <a:r>
+              <a:rPr lang="en-US" sz="2550" dirty="0" spc="-2" kern="0">
                 <a:solidFill>
                   <a:srgbClr val="E4E1D8"/>
                 </a:solidFill>
@@ -4598,7 +4596,7 @@
               <a:t> tùy</a:t>
             </a:r>
             <a:r>
-              <a:rPr lang="en-US" sz="2550" dirty="0" spc="0" kern="0">
+              <a:rPr lang="en-US" sz="2550" dirty="0" spc="1" kern="0">
                 <a:solidFill>
                   <a:srgbClr val="E4E1D8"/>
                 </a:solidFill>
@@ -5826,7 +5824,7 @@
               <a:t> hình,</a:t>
             </a:r>
             <a:r>
-              <a:rPr lang="en-US" sz="3000" b="1" dirty="0" spc="-17" kern="0">
+              <a:rPr lang="en-US" sz="3000" b="1" dirty="0" spc="-15" kern="0">
                 <a:solidFill>
                   <a:srgbClr val="F3EEE3"/>
                 </a:solidFill>
@@ -5834,10 +5832,10 @@
                 <a:ea typeface="Be Vietnam Pro" pitchFamily="34" charset="-122"/>
                 <a:cs typeface="Be Vietnam Pro" pitchFamily="34" charset="-120"/>
               </a:rPr>
-              <a:t> quyền</a:t>
-            </a:r>
-            <a:r>
-              <a:rPr lang="en-US" sz="3000" b="1" dirty="0" spc="2" kern="0">
+              <a:t> quyền,</a:t>
+            </a:r>
+            <a:r>
+              <a:rPr lang="en-US" sz="3000" b="1" dirty="0" spc="4" kern="0">
                 <a:solidFill>
                   <a:srgbClr val="F3EEE3"/>
                 </a:solidFill>
@@ -5845,7 +5843,7 @@
                 <a:ea typeface="Be Vietnam Pro" pitchFamily="34" charset="-122"/>
                 <a:cs typeface="Be Vietnam Pro" pitchFamily="34" charset="-120"/>
               </a:rPr>
-              <a:t> · Giám</a:t>
+              <a:t> giám</a:t>
             </a:r>
             <a:r>
               <a:rPr lang="en-US" sz="3000" b="1" dirty="0" spc="-6" kern="0">

--- a/system-design-101/vi/lessons/sd-13-023/slides/sd-13-023.pptx
+++ b/system-design-101/vi/lessons/sd-13-023/slides/sd-13-023.pptx
@@ -2620,7 +2620,7 @@
               <a:buNone/>
             </a:pPr>
             <a:r>
-              <a:rPr lang="en-US" sz="2400" b="1" dirty="0" spc="-13" kern="0">
+              <a:rPr lang="en-US" sz="2550" b="1" dirty="0" spc="-15" kern="0">
                 <a:solidFill>
                   <a:srgbClr val="14161C"/>
                 </a:solidFill>
@@ -2631,7 +2631,7 @@
               <a:t>Máy</a:t>
             </a:r>
             <a:r>
-              <a:rPr lang="en-US" sz="2400" b="1" dirty="0" spc="0" kern="0">
+              <a:rPr lang="en-US" sz="2550" b="1" dirty="0" spc="0" kern="0">
                 <a:solidFill>
                   <a:srgbClr val="14161C"/>
                 </a:solidFill>
@@ -2642,7 +2642,7 @@
               <a:t> chủ</a:t>
             </a:r>
             <a:r>
-              <a:rPr lang="en-US" sz="2400" b="1" dirty="0" spc="3" kern="0">
+              <a:rPr lang="en-US" sz="2550" b="1" dirty="0" spc="-1" kern="0">
                 <a:solidFill>
                   <a:srgbClr val="14161C"/>
                 </a:solidFill>
@@ -2650,9 +2650,20 @@
                 <a:ea typeface="Be Vietnam Pro" pitchFamily="34" charset="-122"/>
                 <a:cs typeface="Be Vietnam Pro" pitchFamily="34" charset="-120"/>
               </a:rPr>
-              <a:t> tự quản</a:t>
-            </a:r>
-            <a:endParaRPr lang="en-US" sz="2400" dirty="0"/>
+              <a:t> tự</a:t>
+            </a:r>
+            <a:r>
+              <a:rPr lang="en-US" sz="2550" b="1" dirty="0" spc="3" kern="0">
+                <a:solidFill>
+                  <a:srgbClr val="14161C"/>
+                </a:solidFill>
+                <a:latin typeface="Be Vietnam Pro" pitchFamily="34" charset="0"/>
+                <a:ea typeface="Be Vietnam Pro" pitchFamily="34" charset="-122"/>
+                <a:cs typeface="Be Vietnam Pro" pitchFamily="34" charset="-120"/>
+              </a:rPr>
+              <a:t> quản</a:t>
+            </a:r>
+            <a:endParaRPr lang="en-US" sz="2550" dirty="0"/>
           </a:p>
         </p:txBody>
       </p:sp>
@@ -2690,7 +2701,7 @@
               <a:buNone/>
             </a:pPr>
             <a:r>
-              <a:rPr lang="en-US" sz="2400" b="1" dirty="0" spc="-13" kern="0">
+              <a:rPr lang="en-US" sz="2550" b="1" dirty="0" spc="-11" kern="0">
                 <a:solidFill>
                   <a:srgbClr val="14161C"/>
                 </a:solidFill>
@@ -2701,7 +2712,7 @@
               <a:t>Nền</a:t>
             </a:r>
             <a:r>
-              <a:rPr lang="en-US" sz="2400" b="1" dirty="0" spc="-5" kern="0">
+              <a:rPr lang="en-US" sz="2550" b="1" dirty="0" spc="-3" kern="0">
                 <a:solidFill>
                   <a:srgbClr val="14161C"/>
                 </a:solidFill>
@@ -2712,7 +2723,7 @@
               <a:t> tảng</a:t>
             </a:r>
             <a:r>
-              <a:rPr lang="en-US" sz="2400" b="1" dirty="0" spc="2" kern="0">
+              <a:rPr lang="en-US" sz="2550" b="1" dirty="0" spc="2" kern="0">
                 <a:solidFill>
                   <a:srgbClr val="14161C"/>
                 </a:solidFill>
@@ -2723,7 +2734,7 @@
               <a:t> quản</a:t>
             </a:r>
             <a:r>
-              <a:rPr lang="en-US" sz="2400" b="1" dirty="0" spc="1" kern="0">
+              <a:rPr lang="en-US" sz="2550" b="1" dirty="0" spc="-2" kern="0">
                 <a:solidFill>
                   <a:srgbClr val="14161C"/>
                 </a:solidFill>
@@ -2733,7 +2744,7 @@
               </a:rPr>
               <a:t> lý</a:t>
             </a:r>
-            <a:endParaRPr lang="en-US" sz="2400" dirty="0"/>
+            <a:endParaRPr lang="en-US" sz="2550" dirty="0"/>
           </a:p>
         </p:txBody>
       </p:sp>
@@ -2771,7 +2782,7 @@
               <a:buNone/>
             </a:pPr>
             <a:r>
-              <a:rPr lang="en-US" sz="2400" b="1" dirty="0" spc="-3" kern="0">
+              <a:rPr lang="en-US" sz="2550" b="1" dirty="0" spc="-1" kern="0">
                 <a:solidFill>
                   <a:srgbClr val="14161C"/>
                 </a:solidFill>
@@ -2782,7 +2793,7 @@
               <a:t>Hàm</a:t>
             </a:r>
             <a:r>
-              <a:rPr lang="en-US" sz="2400" b="1" dirty="0" spc="-7" kern="0">
+              <a:rPr lang="en-US" sz="2550" b="1" dirty="0" spc="-11" kern="0">
                 <a:solidFill>
                   <a:srgbClr val="14161C"/>
                 </a:solidFill>
@@ -2792,7 +2803,7 @@
               </a:rPr>
               <a:t> serverless</a:t>
             </a:r>
-            <a:endParaRPr lang="en-US" sz="2400" dirty="0"/>
+            <a:endParaRPr lang="en-US" sz="2550" dirty="0"/>
           </a:p>
         </p:txBody>
       </p:sp>

--- a/system-design-101/vi/lessons/sd-13-023/slides/sd-13-023.pptx
+++ b/system-design-101/vi/lessons/sd-13-023/slides/sd-13-023.pptx
@@ -7906,12 +7906,12 @@
                     <a:p>
                       <a:pPr algn="l" indent="0" marL="0">
                         <a:lnSpc>
-                          <a:spcPts val="2880"/>
+                          <a:spcPts val="3060"/>
                         </a:lnSpc>
                         <a:buNone/>
                       </a:pPr>
                       <a:r>
-                        <a:rPr lang="en-US" sz="2400" b="1" dirty="0" spc="-16" kern="0">
+                        <a:rPr lang="en-US" sz="2550" b="1" dirty="0" spc="-16" kern="0">
                           <a:solidFill>
                             <a:srgbClr val="14161C"/>
                           </a:solidFill>
@@ -7922,7 +7922,7 @@
                         <a:t>Trường</a:t>
                       </a:r>
                       <a:r>
-                        <a:rPr lang="en-US" sz="2400" b="1" dirty="0" spc="-2" kern="0">
+                        <a:rPr lang="en-US" sz="2550" b="1" dirty="0" spc="-2" kern="0">
                           <a:solidFill>
                             <a:srgbClr val="14161C"/>
                           </a:solidFill>
@@ -7933,7 +7933,7 @@
                         <a:t> hợp</a:t>
                       </a:r>
                       <a:r>
-                        <a:rPr lang="en-US" sz="2400" b="1" dirty="0" spc="-5" kern="0">
+                        <a:rPr lang="en-US" sz="2550" b="1" dirty="0" spc="-3" kern="0">
                           <a:solidFill>
                             <a:srgbClr val="14161C"/>
                           </a:solidFill>
@@ -7944,7 +7944,7 @@
                         <a:t> (theo</a:t>
                       </a:r>
                       <a:r>
-                        <a:rPr lang="en-US" sz="2400" b="1" dirty="0" spc="-1" kern="0">
+                        <a:rPr lang="en-US" sz="2550" b="1" dirty="0" spc="0" kern="0">
                           <a:solidFill>
                             <a:srgbClr val="14161C"/>
                           </a:solidFill>
@@ -7952,21 +7952,10 @@
                           <a:ea typeface="Be Vietnam Pro" pitchFamily="34" charset="-122"/>
                           <a:cs typeface="Be Vietnam Pro" pitchFamily="34" charset="-120"/>
                         </a:rPr>
-                        <a:t> tài</a:t>
+                        <a:t> tài liệu</a:t>
                       </a:r>
                       <a:r>
-                        <a:rPr lang="en-US" sz="2400" b="1" dirty="0" spc="0" kern="0">
-                          <a:solidFill>
-                            <a:srgbClr val="14161C"/>
-                          </a:solidFill>
-                          <a:latin typeface="Be Vietnam Pro" pitchFamily="34" charset="0"/>
-                          <a:ea typeface="Be Vietnam Pro" pitchFamily="34" charset="-122"/>
-                          <a:cs typeface="Be Vietnam Pro" pitchFamily="34" charset="-120"/>
-                        </a:rPr>
-                        <a:t> liệu</a:t>
-                      </a:r>
-                      <a:r>
-                        <a:rPr lang="en-US" sz="2400" b="1" dirty="0" spc="-8" kern="0">
+                        <a:rPr lang="en-US" sz="2550" b="1" dirty="0" spc="-9" kern="0">
                           <a:solidFill>
                             <a:srgbClr val="14161C"/>
                           </a:solidFill>
@@ -7979,7 +7968,7 @@
                       <a:endParaRPr lang="en-US" sz="1200" dirty="0"/>
                     </a:p>
                   </a:txBody>
-                  <a:tcPr marL="266700" marR="266700" marT="266700" marB="266700" anchor="ctr">
+                  <a:tcPr marL="228600" marR="228600" marT="228600" marB="228600" anchor="ctr">
                     <a:lnL w="0" cap="flat" cmpd="sng" algn="ctr">
                       <a:noFill/>
                     </a:lnL>
@@ -8004,12 +7993,12 @@
                     <a:p>
                       <a:pPr algn="l" indent="0" marL="0">
                         <a:lnSpc>
-                          <a:spcPts val="2880"/>
+                          <a:spcPts val="3060"/>
                         </a:lnSpc>
                         <a:buNone/>
                       </a:pPr>
                       <a:r>
-                        <a:rPr lang="en-US" sz="2400" b="1" dirty="0" spc="-3" kern="0">
+                        <a:rPr lang="en-US" sz="2550" b="1" dirty="0" spc="2" kern="0">
                           <a:solidFill>
                             <a:srgbClr val="14161C"/>
                           </a:solidFill>
@@ -8020,7 +8009,7 @@
                         <a:t>Ai</a:t>
                       </a:r>
                       <a:r>
-                        <a:rPr lang="en-US" sz="2400" b="1" dirty="0" spc="0" kern="0">
+                        <a:rPr lang="en-US" sz="2550" b="1" dirty="0" spc="0" kern="0">
                           <a:solidFill>
                             <a:srgbClr val="14161C"/>
                           </a:solidFill>
@@ -8031,7 +8020,7 @@
                         <a:t> cập</a:t>
                       </a:r>
                       <a:r>
-                        <a:rPr lang="en-US" sz="2400" b="1" dirty="0" spc="-7" kern="0">
+                        <a:rPr lang="en-US" sz="2550" b="1" dirty="0" spc="-6" kern="0">
                           <a:solidFill>
                             <a:srgbClr val="14161C"/>
                           </a:solidFill>
@@ -8044,7 +8033,7 @@
                       <a:endParaRPr lang="en-US" sz="1200" dirty="0"/>
                     </a:p>
                   </a:txBody>
-                  <a:tcPr marL="266700" marR="266700" marT="266700" marB="266700" anchor="ctr">
+                  <a:tcPr marL="228600" marR="228600" marT="228600" marB="228600" anchor="ctr">
                     <a:lnL w="19050" cap="flat" cmpd="sng" algn="ctr">
                       <a:solidFill>
                         <a:srgbClr val="DDD5C1"/>
@@ -8077,12 +8066,12 @@
                     <a:p>
                       <a:pPr algn="l" indent="0" marL="0">
                         <a:lnSpc>
-                          <a:spcPts val="2880"/>
+                          <a:spcPts val="3060"/>
                         </a:lnSpc>
                         <a:buNone/>
                       </a:pPr>
                       <a:r>
-                        <a:rPr lang="en-US" sz="2400" dirty="0" spc="-10" kern="0">
+                        <a:rPr lang="en-US" sz="2550" dirty="0" spc="-11" kern="0">
                           <a:solidFill>
                             <a:srgbClr val="14161C"/>
                           </a:solidFill>
@@ -8093,7 +8082,7 @@
                         <a:t>Container</a:t>
                       </a:r>
                       <a:r>
-                        <a:rPr lang="en-US" sz="2400" dirty="0" spc="-6" kern="0">
+                        <a:rPr lang="en-US" sz="2550" dirty="0" spc="-8" kern="0">
                           <a:solidFill>
                             <a:srgbClr val="14161C"/>
                           </a:solidFill>
@@ -8104,7 +8093,7 @@
                         <a:t> image</a:t>
                       </a:r>
                       <a:r>
-                        <a:rPr lang="en-US" sz="2400" dirty="0" spc="-1" kern="0">
+                        <a:rPr lang="en-US" sz="2550" dirty="0" spc="-2" kern="0">
                           <a:solidFill>
                             <a:srgbClr val="14161C"/>
                           </a:solidFill>
@@ -8115,7 +8104,7 @@
                         <a:t> hoặc</a:t>
                       </a:r>
                       <a:r>
-                        <a:rPr lang="en-US" sz="2400" dirty="0" spc="-5" kern="0">
+                        <a:rPr lang="en-US" sz="2550" dirty="0" spc="-5" kern="0">
                           <a:solidFill>
                             <a:srgbClr val="14161C"/>
                           </a:solidFill>
@@ -8126,7 +8115,7 @@
                         <a:t> runtime</a:t>
                       </a:r>
                       <a:r>
-                        <a:rPr lang="en-US" sz="2400" dirty="0" spc="2" kern="0">
+                        <a:rPr lang="en-US" sz="2550" dirty="0" spc="-2" kern="0">
                           <a:solidFill>
                             <a:srgbClr val="14161C"/>
                           </a:solidFill>
@@ -8137,7 +8126,7 @@
                         <a:t> tự</a:t>
                       </a:r>
                       <a:r>
-                        <a:rPr lang="en-US" sz="2400" dirty="0" spc="23" kern="0">
+                        <a:rPr lang="en-US" sz="2550" dirty="0" spc="19" kern="0">
                           <a:solidFill>
                             <a:srgbClr val="14161C"/>
                           </a:solidFill>
@@ -8150,7 +8139,7 @@
                       <a:endParaRPr lang="en-US" sz="1200" dirty="0"/>
                     </a:p>
                   </a:txBody>
-                  <a:tcPr marL="266700" marR="266700" marT="266700" marB="266700" anchor="ctr">
+                  <a:tcPr marL="228600" marR="228600" marT="228600" marB="228600" anchor="ctr">
                     <a:lnL w="0" cap="flat" cmpd="sng" algn="ctr">
                       <a:noFill/>
                     </a:lnL>
@@ -8181,12 +8170,12 @@
                     <a:p>
                       <a:pPr algn="l" indent="0" marL="0">
                         <a:lnSpc>
-                          <a:spcPts val="2880"/>
+                          <a:spcPts val="3060"/>
                         </a:lnSpc>
                         <a:buNone/>
                       </a:pPr>
                       <a:r>
-                        <a:rPr lang="en-US" sz="2400" dirty="0" kern="0">
+                        <a:rPr lang="en-US" sz="2550" dirty="0" spc="1" kern="0">
                           <a:solidFill>
                             <a:srgbClr val="14161C"/>
                           </a:solidFill>
@@ -8194,12 +8183,23 @@
                           <a:ea typeface="Be Vietnam Pro" pitchFamily="34" charset="-122"/>
                           <a:cs typeface="Be Vietnam Pro" pitchFamily="34" charset="-120"/>
                         </a:rPr>
-                        <a:t>Nhóm bạn</a:t>
+                        <a:t>Nhóm</a:t>
+                      </a:r>
+                      <a:r>
+                        <a:rPr lang="en-US" sz="2550" dirty="0" spc="-3" kern="0">
+                          <a:solidFill>
+                            <a:srgbClr val="14161C"/>
+                          </a:solidFill>
+                          <a:latin typeface="Be Vietnam Pro" pitchFamily="34" charset="0"/>
+                          <a:ea typeface="Be Vietnam Pro" pitchFamily="34" charset="-122"/>
+                          <a:cs typeface="Be Vietnam Pro" pitchFamily="34" charset="-120"/>
+                        </a:rPr>
+                        <a:t> bạn</a:t>
                       </a:r>
                       <a:endParaRPr lang="en-US" sz="1200" dirty="0"/>
                     </a:p>
                   </a:txBody>
-                  <a:tcPr marL="266700" marR="266700" marT="266700" marB="266700" anchor="ctr">
+                  <a:tcPr marL="228600" marR="228600" marT="228600" marB="228600" anchor="ctr">
                     <a:lnL w="19050" cap="flat" cmpd="sng" algn="ctr">
                       <a:solidFill>
                         <a:srgbClr val="DDD5C1"/>
@@ -8238,12 +8238,12 @@
                     <a:p>
                       <a:pPr algn="l" indent="0" marL="0">
                         <a:lnSpc>
-                          <a:spcPts val="2880"/>
+                          <a:spcPts val="3060"/>
                         </a:lnSpc>
                         <a:buNone/>
                       </a:pPr>
                       <a:r>
-                        <a:rPr lang="en-US" sz="2400" dirty="0" spc="-24" kern="0">
+                        <a:rPr lang="en-US" sz="2550" dirty="0" spc="-23" kern="0">
                           <a:solidFill>
                             <a:srgbClr val="14161C"/>
                           </a:solidFill>
@@ -8254,7 +8254,7 @@
                         <a:t>Runtime</a:t>
                       </a:r>
                       <a:r>
-                        <a:rPr lang="en-US" sz="2400" dirty="0" spc="4" kern="0">
+                        <a:rPr lang="en-US" sz="2550" dirty="0" spc="-1" kern="0">
                           <a:solidFill>
                             <a:srgbClr val="14161C"/>
                           </a:solidFill>
@@ -8265,7 +8265,7 @@
                         <a:t> do</a:t>
                       </a:r>
                       <a:r>
-                        <a:rPr lang="en-US" sz="2400" dirty="0" spc="-13" kern="0">
+                        <a:rPr lang="en-US" sz="2550" dirty="0" spc="-16" kern="0">
                           <a:solidFill>
                             <a:srgbClr val="14161C"/>
                           </a:solidFill>
@@ -8276,7 +8276,7 @@
                         <a:t> Lambda</a:t>
                       </a:r>
                       <a:r>
-                        <a:rPr lang="en-US" sz="2400" dirty="0" spc="1" kern="0">
+                        <a:rPr lang="en-US" sz="2550" dirty="0" spc="1" kern="0">
                           <a:solidFill>
                             <a:srgbClr val="14161C"/>
                           </a:solidFill>
@@ -8287,7 +8287,7 @@
                         <a:t> quản</a:t>
                       </a:r>
                       <a:r>
-                        <a:rPr lang="en-US" sz="2400" dirty="0" spc="0" kern="0">
+                        <a:rPr lang="en-US" sz="2550" dirty="0" spc="-1" kern="0">
                           <a:solidFill>
                             <a:srgbClr val="14161C"/>
                           </a:solidFill>
@@ -8295,10 +8295,21 @@
                           <a:ea typeface="Be Vietnam Pro" pitchFamily="34" charset="-122"/>
                           <a:cs typeface="Be Vietnam Pro" pitchFamily="34" charset="-120"/>
                         </a:rPr>
-                        <a:t> lý, chế</a:t>
+                        <a:t> lý,</a:t>
                       </a:r>
                       <a:r>
-                        <a:rPr lang="en-US" sz="2400" dirty="0" spc="17" kern="0">
+                        <a:rPr lang="en-US" sz="2550" dirty="0" spc="1" kern="0">
+                          <a:solidFill>
+                            <a:srgbClr val="14161C"/>
+                          </a:solidFill>
+                          <a:latin typeface="Be Vietnam Pro" pitchFamily="34" charset="0"/>
+                          <a:ea typeface="Be Vietnam Pro" pitchFamily="34" charset="-122"/>
+                          <a:cs typeface="Be Vietnam Pro" pitchFamily="34" charset="-120"/>
+                        </a:rPr>
+                        <a:t> chế</a:t>
+                      </a:r>
+                      <a:r>
+                        <a:rPr lang="en-US" sz="2550" dirty="0" spc="17" kern="0">
                           <a:solidFill>
                             <a:srgbClr val="14161C"/>
                           </a:solidFill>
@@ -8309,7 +8320,7 @@
                         <a:t> độ</a:t>
                       </a:r>
                       <a:r>
-                        <a:rPr lang="en-US" sz="2400" dirty="0" spc="-18" kern="0">
+                        <a:rPr lang="en-US" sz="2550" dirty="0" spc="-19" kern="0">
                           <a:solidFill>
                             <a:srgbClr val="14161C"/>
                           </a:solidFill>
@@ -8322,7 +8333,7 @@
                       <a:endParaRPr lang="en-US" sz="1200" dirty="0"/>
                     </a:p>
                   </a:txBody>
-                  <a:tcPr marL="266700" marR="266700" marT="266700" marB="266700" anchor="ctr">
+                  <a:tcPr marL="228600" marR="228600" marT="228600" marB="228600" anchor="ctr">
                     <a:lnL w="0" cap="flat" cmpd="sng" algn="ctr">
                       <a:noFill/>
                     </a:lnL>
@@ -8353,12 +8364,12 @@
                     <a:p>
                       <a:pPr algn="l" indent="0" marL="0">
                         <a:lnSpc>
-                          <a:spcPts val="2880"/>
+                          <a:spcPts val="3060"/>
                         </a:lnSpc>
                         <a:buNone/>
                       </a:pPr>
                       <a:r>
-                        <a:rPr lang="en-US" sz="2400" dirty="0" spc="-16" kern="0">
+                        <a:rPr lang="en-US" sz="2550" dirty="0" spc="-18" kern="0">
                           <a:solidFill>
                             <a:srgbClr val="14161C"/>
                           </a:solidFill>
@@ -8369,7 +8380,7 @@
                         <a:t>Lambda</a:t>
                       </a:r>
                       <a:r>
-                        <a:rPr lang="en-US" sz="2400" dirty="0" spc="4" kern="0">
+                        <a:rPr lang="en-US" sz="2550" dirty="0" spc="-1" kern="0">
                           <a:solidFill>
                             <a:srgbClr val="14161C"/>
                           </a:solidFill>
@@ -8380,7 +8391,7 @@
                         <a:t> tự</a:t>
                       </a:r>
                       <a:r>
-                        <a:rPr lang="en-US" sz="2400" dirty="0" spc="3" kern="0">
+                        <a:rPr lang="en-US" sz="2550" dirty="0" spc="0" kern="0">
                           <a:solidFill>
                             <a:srgbClr val="14161C"/>
                           </a:solidFill>
@@ -8388,12 +8399,23 @@
                           <a:ea typeface="Be Vietnam Pro" pitchFamily="34" charset="-122"/>
                           <a:cs typeface="Be Vietnam Pro" pitchFamily="34" charset="-120"/>
                         </a:rPr>
-                        <a:t> áp dụng</a:t>
+                        <a:t> áp</a:t>
+                      </a:r>
+                      <a:r>
+                        <a:rPr lang="en-US" sz="2550" dirty="0" spc="-1" kern="0">
+                          <a:solidFill>
+                            <a:srgbClr val="14161C"/>
+                          </a:solidFill>
+                          <a:latin typeface="Be Vietnam Pro" pitchFamily="34" charset="0"/>
+                          <a:ea typeface="Be Vietnam Pro" pitchFamily="34" charset="-122"/>
+                          <a:cs typeface="Be Vietnam Pro" pitchFamily="34" charset="-120"/>
+                        </a:rPr>
+                        <a:t> dụng</a:t>
                       </a:r>
                       <a:endParaRPr lang="en-US" sz="1200" dirty="0"/>
                     </a:p>
                   </a:txBody>
-                  <a:tcPr marL="266700" marR="266700" marT="266700" marB="266700" anchor="ctr">
+                  <a:tcPr marL="228600" marR="228600" marT="228600" marB="228600" anchor="ctr">
                     <a:lnL w="19050" cap="flat" cmpd="sng" algn="ctr">
                       <a:solidFill>
                         <a:srgbClr val="DDD5C1"/>
@@ -8432,12 +8454,12 @@
                     <a:p>
                       <a:pPr algn="l" indent="0" marL="0">
                         <a:lnSpc>
-                          <a:spcPts val="2880"/>
+                          <a:spcPts val="3060"/>
                         </a:lnSpc>
                         <a:buNone/>
                       </a:pPr>
                       <a:r>
-                        <a:rPr lang="en-US" sz="2400" dirty="0" spc="-1" kern="0">
+                        <a:rPr lang="en-US" sz="2550" dirty="0" spc="1" kern="0">
                           <a:solidFill>
                             <a:srgbClr val="14161C"/>
                           </a:solidFill>
@@ -8448,7 +8470,7 @@
                         <a:t>Chế</a:t>
                       </a:r>
                       <a:r>
-                        <a:rPr lang="en-US" sz="2400" dirty="0" spc="17" kern="0">
+                        <a:rPr lang="en-US" sz="2550" dirty="0" spc="17" kern="0">
                           <a:solidFill>
                             <a:srgbClr val="14161C"/>
                           </a:solidFill>
@@ -8459,7 +8481,7 @@
                         <a:t> độ</a:t>
                       </a:r>
                       <a:r>
-                        <a:rPr lang="en-US" sz="2400" dirty="0" spc="-1" kern="0">
+                        <a:rPr lang="en-US" sz="2550" dirty="0" spc="1" kern="0">
                           <a:solidFill>
                             <a:srgbClr val="14161C"/>
                           </a:solidFill>
@@ -8470,7 +8492,7 @@
                         <a:t> Function</a:t>
                       </a:r>
                       <a:r>
-                        <a:rPr lang="en-US" sz="2400" dirty="0" spc="-14" kern="0">
+                        <a:rPr lang="en-US" sz="2550" dirty="0" spc="-15" kern="0">
                           <a:solidFill>
                             <a:srgbClr val="14161C"/>
                           </a:solidFill>
@@ -8481,7 +8503,7 @@
                         <a:t> update</a:t>
                       </a:r>
                       <a:r>
-                        <a:rPr lang="en-US" sz="2400" dirty="0" spc="-2" kern="0">
+                        <a:rPr lang="en-US" sz="2550" dirty="0" spc="-3" kern="0">
                           <a:solidFill>
                             <a:srgbClr val="14161C"/>
                           </a:solidFill>
@@ -8492,7 +8514,7 @@
                         <a:t> hoặc</a:t>
                       </a:r>
                       <a:r>
-                        <a:rPr lang="en-US" sz="2400" dirty="0" spc="1" kern="0">
+                        <a:rPr lang="en-US" sz="2550" dirty="0" spc="1" kern="0">
                           <a:solidFill>
                             <a:srgbClr val="14161C"/>
                           </a:solidFill>
@@ -8505,7 +8527,7 @@
                       <a:endParaRPr lang="en-US" sz="1200" dirty="0"/>
                     </a:p>
                   </a:txBody>
-                  <a:tcPr marL="266700" marR="266700" marT="266700" marB="266700" anchor="ctr">
+                  <a:tcPr marL="228600" marR="228600" marT="228600" marB="228600" anchor="ctr">
                     <a:lnL w="0" cap="flat" cmpd="sng" algn="ctr">
                       <a:noFill/>
                     </a:lnL>
@@ -8536,12 +8558,12 @@
                     <a:p>
                       <a:pPr algn="l" indent="0" marL="0">
                         <a:lnSpc>
-                          <a:spcPts val="2880"/>
+                          <a:spcPts val="3060"/>
                         </a:lnSpc>
                         <a:buNone/>
                       </a:pPr>
                       <a:r>
-                        <a:rPr lang="en-US" sz="2400" dirty="0" spc="3" kern="0">
+                        <a:rPr lang="en-US" sz="2550" dirty="0" spc="2" kern="0">
                           <a:solidFill>
                             <a:srgbClr val="14161C"/>
                           </a:solidFill>
@@ -8552,7 +8574,7 @@
                         <a:t>Bạn</a:t>
                       </a:r>
                       <a:r>
-                        <a:rPr lang="en-US" sz="2400" dirty="0" spc="2" kern="0">
+                        <a:rPr lang="en-US" sz="2550" dirty="0" spc="1" kern="0">
                           <a:solidFill>
                             <a:srgbClr val="14161C"/>
                           </a:solidFill>
@@ -8563,7 +8585,7 @@
                         <a:t> cập</a:t>
                       </a:r>
                       <a:r>
-                        <a:rPr lang="en-US" sz="2400" dirty="0" spc="-8" kern="0">
+                        <a:rPr lang="en-US" sz="2550" dirty="0" spc="-10" kern="0">
                           <a:solidFill>
                             <a:srgbClr val="14161C"/>
                           </a:solidFill>
@@ -8574,7 +8596,7 @@
                         <a:t> nhật</a:t>
                       </a:r>
                       <a:r>
-                        <a:rPr lang="en-US" sz="2400" dirty="0" spc="3" kern="0">
+                        <a:rPr lang="en-US" sz="2550" dirty="0" spc="1" kern="0">
                           <a:solidFill>
                             <a:srgbClr val="14161C"/>
                           </a:solidFill>
@@ -8585,7 +8607,7 @@
                         <a:t> hàm</a:t>
                       </a:r>
                       <a:r>
-                        <a:rPr lang="en-US" sz="2400" dirty="0" spc="-2" kern="0">
+                        <a:rPr lang="en-US" sz="2550" dirty="0" spc="-2" kern="0">
                           <a:solidFill>
                             <a:srgbClr val="14161C"/>
                           </a:solidFill>
@@ -8596,7 +8618,7 @@
                         <a:t> hoặc</a:t>
                       </a:r>
                       <a:r>
-                        <a:rPr lang="en-US" sz="2400" dirty="0" spc="0" kern="0">
+                        <a:rPr lang="en-US" sz="2550" dirty="0" spc="-1" kern="0">
                           <a:solidFill>
                             <a:srgbClr val="14161C"/>
                           </a:solidFill>
@@ -8604,10 +8626,21 @@
                           <a:ea typeface="Be Vietnam Pro" pitchFamily="34" charset="-122"/>
                           <a:cs typeface="Be Vietnam Pro" pitchFamily="34" charset="-120"/>
                         </a:rPr>
-                        <a:t> chọn phiên</a:t>
+                        <a:t> chọn</a:t>
                       </a:r>
                       <a:r>
-                        <a:rPr lang="en-US" sz="2400" dirty="0" spc="-1" kern="0">
+                        <a:rPr lang="en-US" sz="2550" dirty="0" spc="0" kern="0">
+                          <a:solidFill>
+                            <a:srgbClr val="14161C"/>
+                          </a:solidFill>
+                          <a:latin typeface="Be Vietnam Pro" pitchFamily="34" charset="0"/>
+                          <a:ea typeface="Be Vietnam Pro" pitchFamily="34" charset="-122"/>
+                          <a:cs typeface="Be Vietnam Pro" pitchFamily="34" charset="-120"/>
+                        </a:rPr>
+                        <a:t> phiên</a:t>
+                      </a:r>
+                      <a:r>
+                        <a:rPr lang="en-US" sz="2550" dirty="0" spc="-3" kern="0">
                           <a:solidFill>
                             <a:srgbClr val="14161C"/>
                           </a:solidFill>
@@ -8620,7 +8653,7 @@
                       <a:endParaRPr lang="en-US" sz="1200" dirty="0"/>
                     </a:p>
                   </a:txBody>
-                  <a:tcPr marL="266700" marR="266700" marT="266700" marB="266700" anchor="ctr">
+                  <a:tcPr marL="228600" marR="228600" marT="228600" marB="228600" anchor="ctr">
                     <a:lnL w="19050" cap="flat" cmpd="sng" algn="ctr">
                       <a:solidFill>
                         <a:srgbClr val="DDD5C1"/>
@@ -8659,12 +8692,12 @@
                     <a:p>
                       <a:pPr algn="l" indent="0" marL="0">
                         <a:lnSpc>
-                          <a:spcPts val="2880"/>
+                          <a:spcPts val="3060"/>
                         </a:lnSpc>
                         <a:buNone/>
                       </a:pPr>
                       <a:r>
-                        <a:rPr lang="en-US" sz="2400" dirty="0" spc="-24" kern="0">
+                        <a:rPr lang="en-US" sz="2550" dirty="0" spc="-23" kern="0">
                           <a:solidFill>
                             <a:srgbClr val="14161C"/>
                           </a:solidFill>
@@ -8675,7 +8708,7 @@
                         <a:t>Runtime</a:t>
                       </a:r>
                       <a:r>
-                        <a:rPr lang="en-US" sz="2400" dirty="0" spc="20" kern="0">
+                        <a:rPr lang="en-US" sz="2550" dirty="0" spc="17" kern="0">
                           <a:solidFill>
                             <a:srgbClr val="14161C"/>
                           </a:solidFill>
@@ -8686,7 +8719,7 @@
                         <a:t> đã</a:t>
                       </a:r>
                       <a:r>
-                        <a:rPr lang="en-US" sz="2400" dirty="0" spc="19" kern="0">
+                        <a:rPr lang="en-US" sz="2550" dirty="0" spc="16" kern="0">
                           <a:solidFill>
                             <a:srgbClr val="14161C"/>
                           </a:solidFill>
@@ -8697,7 +8730,7 @@
                         <a:t> ngừng</a:t>
                       </a:r>
                       <a:r>
-                        <a:rPr lang="en-US" sz="2400" dirty="0" spc="2" kern="0">
+                        <a:rPr lang="en-US" sz="2550" dirty="0" spc="0" kern="0">
                           <a:solidFill>
                             <a:srgbClr val="14161C"/>
                           </a:solidFill>
@@ -8708,7 +8741,7 @@
                         <a:t> hỗ</a:t>
                       </a:r>
                       <a:r>
-                        <a:rPr lang="en-US" sz="2400" dirty="0" spc="-22" kern="0">
+                        <a:rPr lang="en-US" sz="2550" dirty="0" spc="-25" kern="0">
                           <a:solidFill>
                             <a:srgbClr val="14161C"/>
                           </a:solidFill>
@@ -8721,7 +8754,7 @@
                       <a:endParaRPr lang="en-US" sz="1200" dirty="0"/>
                     </a:p>
                   </a:txBody>
-                  <a:tcPr marL="266700" marR="266700" marT="266700" marB="266700" anchor="ctr">
+                  <a:tcPr marL="228600" marR="228600" marT="228600" marB="228600" anchor="ctr">
                     <a:lnL w="0" cap="flat" cmpd="sng" algn="ctr">
                       <a:noFill/>
                     </a:lnL>
@@ -8752,12 +8785,12 @@
                     <a:p>
                       <a:pPr algn="l" indent="0" marL="0">
                         <a:lnSpc>
-                          <a:spcPts val="2880"/>
+                          <a:spcPts val="3060"/>
                         </a:lnSpc>
                         <a:buNone/>
                       </a:pPr>
                       <a:r>
-                        <a:rPr lang="en-US" sz="2400" dirty="0" spc="28" kern="0">
+                        <a:rPr lang="en-US" sz="2550" dirty="0" spc="24" kern="0">
                           <a:solidFill>
                             <a:srgbClr val="14161C"/>
                           </a:solidFill>
@@ -8768,7 +8801,7 @@
                         <a:t>Đừng</a:t>
                       </a:r>
                       <a:r>
-                        <a:rPr lang="en-US" sz="2400" dirty="0" spc="0" kern="0">
+                        <a:rPr lang="en-US" sz="2550" dirty="0" spc="-1" kern="0">
                           <a:solidFill>
                             <a:srgbClr val="14161C"/>
                           </a:solidFill>
@@ -8779,7 +8812,7 @@
                         <a:t> chờ</a:t>
                       </a:r>
                       <a:r>
-                        <a:rPr lang="en-US" sz="2400" dirty="0" spc="-12" kern="0">
+                        <a:rPr lang="en-US" sz="2550" dirty="0" spc="-13" kern="0">
                           <a:solidFill>
                             <a:srgbClr val="14161C"/>
                           </a:solidFill>
@@ -8790,7 +8823,7 @@
                         <a:t> vá:</a:t>
                       </a:r>
                       <a:r>
-                        <a:rPr lang="en-US" sz="2400" dirty="0" spc="-13" kern="0">
+                        <a:rPr lang="en-US" sz="2550" dirty="0" spc="-12" kern="0">
                           <a:solidFill>
                             <a:srgbClr val="14161C"/>
                           </a:solidFill>
@@ -8801,7 +8834,7 @@
                         <a:t> chuyển</a:t>
                       </a:r>
                       <a:r>
-                        <a:rPr lang="en-US" sz="2400" dirty="0" spc="-5" kern="0">
+                        <a:rPr lang="en-US" sz="2550" dirty="0" spc="-5" kern="0">
                           <a:solidFill>
                             <a:srgbClr val="14161C"/>
                           </a:solidFill>
@@ -8812,7 +8845,7 @@
                         <a:t> runtime</a:t>
                       </a:r>
                       <a:r>
-                        <a:rPr lang="en-US" sz="2400" dirty="0" spc="-1" kern="0">
+                        <a:rPr lang="en-US" sz="2550" dirty="0" spc="0" kern="0">
                           <a:solidFill>
                             <a:srgbClr val="14161C"/>
                           </a:solidFill>
@@ -8823,7 +8856,7 @@
                         <a:t> còn</a:t>
                       </a:r>
                       <a:r>
-                        <a:rPr lang="en-US" sz="2400" dirty="0" spc="1" kern="0">
+                        <a:rPr lang="en-US" sz="2550" dirty="0" spc="-1" kern="0">
                           <a:solidFill>
                             <a:srgbClr val="14161C"/>
                           </a:solidFill>
@@ -8834,7 +8867,7 @@
                         <a:t> hỗ</a:t>
                       </a:r>
                       <a:r>
-                        <a:rPr lang="en-US" sz="2400" dirty="0" spc="-21" kern="0">
+                        <a:rPr lang="en-US" sz="2550" dirty="0" spc="-25" kern="0">
                           <a:solidFill>
                             <a:srgbClr val="14161C"/>
                           </a:solidFill>
@@ -8847,7 +8880,7 @@
                       <a:endParaRPr lang="en-US" sz="1200" dirty="0"/>
                     </a:p>
                   </a:txBody>
-                  <a:tcPr marL="266700" marR="266700" marT="266700" marB="266700" anchor="ctr">
+                  <a:tcPr marL="228600" marR="228600" marT="228600" marB="228600" anchor="ctr">
                     <a:lnL w="19050" cap="flat" cmpd="sng" algn="ctr">
                       <a:solidFill>
                         <a:srgbClr val="DDD5C1"/>
